--- a/deck/AI_Cost_August_2026_MTD.pptx
+++ b/deck/AI_Cost_August_2026_MTD.pptx
@@ -7381,7 +7381,7 @@
         </p:nvSpPr>
         <p:spPr>
           <a:xfrm>
-            <a:off x="457200" y="3337560"/>
+            <a:off x="457200" y="3520440"/>
             <a:ext cx="2834640" cy="292608"/>
           </a:xfrm>
           <a:prstGeom prst="rect">
@@ -7420,7 +7420,7 @@
         </p:nvSpPr>
         <p:spPr>
           <a:xfrm>
-            <a:off x="3474720" y="3410712"/>
+            <a:off x="3474720" y="3593592"/>
             <a:ext cx="7071055" cy="146304"/>
           </a:xfrm>
           <a:prstGeom prst="roundRect">
@@ -7447,7 +7447,7 @@
         </p:nvSpPr>
         <p:spPr>
           <a:xfrm>
-            <a:off x="3474720" y="3410712"/>
+            <a:off x="3474720" y="3593592"/>
             <a:ext cx="2643810" cy="146304"/>
           </a:xfrm>
           <a:prstGeom prst="roundRect">
@@ -7474,7 +7474,7 @@
         </p:nvSpPr>
         <p:spPr>
           <a:xfrm>
-            <a:off x="10682935" y="3337560"/>
+            <a:off x="10682935" y="3520440"/>
             <a:ext cx="1051560" cy="292608"/>
           </a:xfrm>
           <a:prstGeom prst="rect">
@@ -7513,7 +7513,7 @@
         </p:nvSpPr>
         <p:spPr>
           <a:xfrm>
-            <a:off x="457200" y="3721608"/>
+            <a:off x="457200" y="4087368"/>
             <a:ext cx="2834640" cy="292608"/>
           </a:xfrm>
           <a:prstGeom prst="rect">
@@ -7552,7 +7552,7 @@
         </p:nvSpPr>
         <p:spPr>
           <a:xfrm>
-            <a:off x="3474720" y="3794760"/>
+            <a:off x="3474720" y="4160520"/>
             <a:ext cx="7071055" cy="146304"/>
           </a:xfrm>
           <a:prstGeom prst="roundRect">
@@ -7579,7 +7579,7 @@
         </p:nvSpPr>
         <p:spPr>
           <a:xfrm>
-            <a:off x="3474720" y="3794760"/>
+            <a:off x="3474720" y="4160520"/>
             <a:ext cx="191625" cy="146304"/>
           </a:xfrm>
           <a:prstGeom prst="roundRect">
@@ -7606,7 +7606,7 @@
         </p:nvSpPr>
         <p:spPr>
           <a:xfrm>
-            <a:off x="10682935" y="3721608"/>
+            <a:off x="10682935" y="4087368"/>
             <a:ext cx="1051560" cy="292608"/>
           </a:xfrm>
           <a:prstGeom prst="rect">
@@ -7645,7 +7645,7 @@
         </p:nvSpPr>
         <p:spPr>
           <a:xfrm>
-            <a:off x="457200" y="5185474"/>
+            <a:off x="457200" y="5176330"/>
             <a:ext cx="11277295" cy="1041591"/>
           </a:xfrm>
           <a:prstGeom prst="roundRect">
@@ -7672,7 +7672,7 @@
         </p:nvSpPr>
         <p:spPr>
           <a:xfrm>
-            <a:off x="685800" y="5295202"/>
+            <a:off x="685800" y="5286058"/>
             <a:ext cx="10820095" cy="292608"/>
           </a:xfrm>
           <a:prstGeom prst="rect">
@@ -7711,7 +7711,7 @@
         </p:nvSpPr>
         <p:spPr>
           <a:xfrm>
-            <a:off x="685800" y="5624386"/>
+            <a:off x="685800" y="5615242"/>
             <a:ext cx="10820095" cy="474663"/>
           </a:xfrm>
           <a:prstGeom prst="rect">

--- a/deck/AI_Cost_August_2026_MTD.pptx
+++ b/deck/AI_Cost_August_2026_MTD.pptx
@@ -2282,7 +2282,7 @@
         <p:spPr>
           <a:xfrm>
             <a:off x="8321040" y="493776"/>
-            <a:ext cx="3413455" cy="658368"/>
+            <a:ext cx="3413455" cy="731520"/>
           </a:xfrm>
           <a:prstGeom prst="rect">
             <a:avLst/>
@@ -3315,7 +3315,7 @@
         <p:spPr>
           <a:xfrm>
             <a:off x="8321040" y="493776"/>
-            <a:ext cx="3413455" cy="658368"/>
+            <a:ext cx="3413455" cy="731520"/>
           </a:xfrm>
           <a:prstGeom prst="rect">
             <a:avLst/>
@@ -4348,7 +4348,7 @@
         <p:spPr>
           <a:xfrm>
             <a:off x="8321040" y="493776"/>
-            <a:ext cx="3413455" cy="658368"/>
+            <a:ext cx="3413455" cy="731520"/>
           </a:xfrm>
           <a:prstGeom prst="rect">
             <a:avLst/>
@@ -6099,7 +6099,7 @@
         <p:spPr>
           <a:xfrm>
             <a:off x="8321040" y="493776"/>
-            <a:ext cx="3413455" cy="658368"/>
+            <a:ext cx="3413455" cy="731520"/>
           </a:xfrm>
           <a:prstGeom prst="rect">
             <a:avLst/>
@@ -6839,7 +6839,7 @@
         <p:spPr>
           <a:xfrm>
             <a:off x="8321040" y="493776"/>
-            <a:ext cx="3413455" cy="658368"/>
+            <a:ext cx="3413455" cy="731520"/>
           </a:xfrm>
           <a:prstGeom prst="rect">
             <a:avLst/>
@@ -7914,7 +7914,7 @@
         <p:spPr>
           <a:xfrm>
             <a:off x="8321040" y="493776"/>
-            <a:ext cx="3413455" cy="658368"/>
+            <a:ext cx="3413455" cy="731520"/>
           </a:xfrm>
           <a:prstGeom prst="rect">
             <a:avLst/>
@@ -10353,7 +10353,7 @@
         <p:spPr>
           <a:xfrm>
             <a:off x="8321040" y="493776"/>
-            <a:ext cx="3413455" cy="658368"/>
+            <a:ext cx="3413455" cy="731520"/>
           </a:xfrm>
           <a:prstGeom prst="rect">
             <a:avLst/>

--- a/deck/AI_Cost_August_2026_MTD.pptx
+++ b/deck/AI_Cost_August_2026_MTD.pptx
@@ -9751,7 +9751,7 @@
         </p:nvSpPr>
         <p:spPr>
           <a:xfrm>
-            <a:off x="457200" y="4986528"/>
+            <a:off x="457200" y="4569643"/>
             <a:ext cx="3606698" cy="1078992"/>
           </a:xfrm>
           <a:prstGeom prst="roundRect">
@@ -9778,7 +9778,7 @@
         </p:nvSpPr>
         <p:spPr>
           <a:xfrm>
-            <a:off x="658368" y="5077968"/>
+            <a:off x="658368" y="4661083"/>
             <a:ext cx="3204362" cy="237744"/>
           </a:xfrm>
           <a:prstGeom prst="rect">
@@ -9817,7 +9817,7 @@
         </p:nvSpPr>
         <p:spPr>
           <a:xfrm>
-            <a:off x="658368" y="5279136"/>
+            <a:off x="658368" y="4862251"/>
             <a:ext cx="3204362" cy="438912"/>
           </a:xfrm>
           <a:prstGeom prst="rect">
@@ -9856,7 +9856,7 @@
         </p:nvSpPr>
         <p:spPr>
           <a:xfrm>
-            <a:off x="658368" y="5681472"/>
+            <a:off x="658368" y="5264587"/>
             <a:ext cx="3204362" cy="338328"/>
           </a:xfrm>
           <a:prstGeom prst="rect">
@@ -9898,7 +9898,7 @@
         </p:nvSpPr>
         <p:spPr>
           <a:xfrm>
-            <a:off x="4292498" y="4986528"/>
+            <a:off x="4292498" y="4569643"/>
             <a:ext cx="3606698" cy="1078992"/>
           </a:xfrm>
           <a:prstGeom prst="roundRect">
@@ -9925,7 +9925,7 @@
         </p:nvSpPr>
         <p:spPr>
           <a:xfrm>
-            <a:off x="4493666" y="5077968"/>
+            <a:off x="4493666" y="4661083"/>
             <a:ext cx="3204362" cy="237744"/>
           </a:xfrm>
           <a:prstGeom prst="rect">
@@ -9964,7 +9964,7 @@
         </p:nvSpPr>
         <p:spPr>
           <a:xfrm>
-            <a:off x="4493666" y="5279136"/>
+            <a:off x="4493666" y="4862251"/>
             <a:ext cx="3204362" cy="438912"/>
           </a:xfrm>
           <a:prstGeom prst="rect">
@@ -10003,7 +10003,7 @@
         </p:nvSpPr>
         <p:spPr>
           <a:xfrm>
-            <a:off x="4493666" y="5681472"/>
+            <a:off x="4493666" y="5264587"/>
             <a:ext cx="3204362" cy="338328"/>
           </a:xfrm>
           <a:prstGeom prst="rect">
@@ -10045,7 +10045,7 @@
         </p:nvSpPr>
         <p:spPr>
           <a:xfrm>
-            <a:off x="8127797" y="4986528"/>
+            <a:off x="8127797" y="4569643"/>
             <a:ext cx="3606698" cy="1078992"/>
           </a:xfrm>
           <a:prstGeom prst="roundRect">
@@ -10072,7 +10072,7 @@
         </p:nvSpPr>
         <p:spPr>
           <a:xfrm>
-            <a:off x="8328965" y="5077968"/>
+            <a:off x="8328965" y="4661083"/>
             <a:ext cx="3204362" cy="237744"/>
           </a:xfrm>
           <a:prstGeom prst="rect">
@@ -10111,7 +10111,7 @@
         </p:nvSpPr>
         <p:spPr>
           <a:xfrm>
-            <a:off x="8328965" y="5279136"/>
+            <a:off x="8328965" y="4862251"/>
             <a:ext cx="3204362" cy="438912"/>
           </a:xfrm>
           <a:prstGeom prst="rect">
@@ -10150,7 +10150,7 @@
         </p:nvSpPr>
         <p:spPr>
           <a:xfrm>
-            <a:off x="8328965" y="5681472"/>
+            <a:off x="8328965" y="5264587"/>
             <a:ext cx="3204362" cy="338328"/>
           </a:xfrm>
           <a:prstGeom prst="rect">
